--- a/doc/13_アーキテクチャ説明資料.pptx
+++ b/doc/13_アーキテクチャ説明資料.pptx
@@ -3740,7 +3740,7 @@
                 <a:cs typeface="Meiryo"/>
                 <a:ea typeface="Meiryo"/>
               </a:rPr>
-              <a:t>データの読み書き(14本)</a:t>
+              <a:t>データの読み書き(15本)</a:t>
             </a:r>
           </a:p>
         </p:txBody>
@@ -4050,6 +4050,32 @@
                 <a:ea typeface="Meiryo"/>
               </a:rPr>
               <a:t>Coupon クーポン</a:t>
+            </a:r>
+          </a:p>
+          <a:p>
+            <a:pPr marL="182880" indent="-182880">
+              <a:lnSpc>
+                <a:spcPct val="125000"/>
+              </a:lnSpc>
+              <a:spcBef>
+                <a:spcPts val="550"/>
+              </a:spcBef>
+              <a:buClr>
+                <a:srgbClr val="0369A1"/>
+              </a:buClr>
+              <a:buFont typeface="Meiryo"/>
+              <a:buChar char="▪"/>
+            </a:pPr>
+            <a:r>
+              <a:rPr sz="1050" b="0">
+                <a:solidFill>
+                  <a:srgbClr val="14223A"/>
+                </a:solidFill>
+                <a:latin typeface="Meiryo"/>
+                <a:cs typeface="Meiryo"/>
+                <a:ea typeface="Meiryo"/>
+              </a:rPr>
+              <a:t>CustomerCoupon 顧客へのクーポン配布</a:t>
             </a:r>
           </a:p>
           <a:p>
@@ -22131,7 +22157,7 @@
                 <a:cs typeface="Meiryo"/>
                 <a:ea typeface="Meiryo"/>
               </a:rPr>
-              <a:t>:customers 37列の肥大化、業務データを平文にした前提、予約の二重取り防止、廃棄手順、監査の時期(doc/12 第3〜4章)</a:t>
+              <a:t>:customers 39列の肥大化、業務データを平文にした前提、予約の二重取り防止、廃棄手順、監査の時期(doc/12 第3〜4章)</a:t>
             </a:r>
           </a:p>
           <a:p>

--- a/doc/13_アーキテクチャ説明資料.pptx
+++ b/doc/13_アーキテクチャ説明資料.pptx
@@ -23776,7 +23776,7 @@
                 <a:cs typeface="Meiryo"/>
                 <a:ea typeface="Meiryo"/>
               </a:rPr>
-              <a:t> / マイグレーション1本</a:t>
+              <a:t> / マイグレーション2本</a:t>
             </a:r>
           </a:p>
         </p:txBody>

--- a/doc/13_アーキテクチャ説明資料.pptx
+++ b/doc/13_アーキテクチャ説明資料.pptx
@@ -3501,7 +3501,7 @@
                 <a:cs typeface="Meiryo"/>
                 <a:ea typeface="Meiryo"/>
               </a:rPr>
-              <a:t>窓口(ポート)の一覧 — 28本</a:t>
+              <a:t>窓口(ポート)の一覧 — 29本</a:t>
             </a:r>
             <a:r>
               <a:rPr sz="1250" b="0" i="0">
@@ -3740,7 +3740,7 @@
                 <a:cs typeface="Meiryo"/>
                 <a:ea typeface="Meiryo"/>
               </a:rPr>
-              <a:t>データの読み書き(14本)</a:t>
+              <a:t>データの読み書き(15本)</a:t>
             </a:r>
           </a:p>
         </p:txBody>
@@ -4050,6 +4050,32 @@
                 <a:ea typeface="Meiryo"/>
               </a:rPr>
               <a:t>Coupon クーポン</a:t>
+            </a:r>
+          </a:p>
+          <a:p>
+            <a:pPr marL="182880" indent="-182880">
+              <a:lnSpc>
+                <a:spcPct val="125000"/>
+              </a:lnSpc>
+              <a:spcBef>
+                <a:spcPts val="550"/>
+              </a:spcBef>
+              <a:buClr>
+                <a:srgbClr val="0369A1"/>
+              </a:buClr>
+              <a:buFont typeface="Meiryo"/>
+              <a:buChar char="▪"/>
+            </a:pPr>
+            <a:r>
+              <a:rPr sz="1050" b="0">
+                <a:solidFill>
+                  <a:srgbClr val="14223A"/>
+                </a:solidFill>
+                <a:latin typeface="Meiryo"/>
+                <a:cs typeface="Meiryo"/>
+                <a:ea typeface="Meiryo"/>
+              </a:rPr>
+              <a:t>CustomerCoupon 顧客へのクーポン配布</a:t>
             </a:r>
           </a:p>
           <a:p>
@@ -4936,7 +4962,7 @@
                 <a:cs typeface="Meiryo"/>
                 <a:ea typeface="Meiryo"/>
               </a:rPr>
-              <a:t>テストでは偽の実装を渡すだけで済む。データベースも外部APIも起動しないため、692件のテストが約15秒で終わる</a:t>
+              <a:t>テストでは偽の実装を渡すだけで済む。データベースも外部APIも起動しないため、728件のテストが約15秒で終わる</a:t>
             </a:r>
           </a:p>
         </p:txBody>
@@ -13444,7 +13470,7 @@
                 <a:cs typeface="Meiryo"/>
                 <a:ea typeface="Meiryo"/>
               </a:rPr>
-              <a:t>同じマイグレーション(33テーブル)・同じ行レベルセキュリティ・同じ業務ロジック・同じAPIルート</a:t>
+              <a:t>同じマイグレーション(34テーブル)・同じ行レベルセキュリティ・同じ業務ロジック・同じAPIルート</a:t>
             </a:r>
           </a:p>
           <a:p>
@@ -14364,7 +14390,7 @@
                 <a:cs typeface="Meiryo"/>
                 <a:ea typeface="Meiryo"/>
               </a:rPr>
-              <a:t>   テスト55ファイル / 692件。分布は意図的に偏らせている</a:t>
+              <a:t>   テスト56ファイル / 728件。分布は意図的に偏らせている</a:t>
             </a:r>
           </a:p>
         </p:txBody>
@@ -16664,7 +16690,7 @@
                           <a:cs typeface="Meiryo"/>
                           <a:ea typeface="Meiryo"/>
                         </a:rPr>
-                        <a:t>33テーブル、複合外部キー、FORCE。静的検査と実DB検証をCIで実行</a:t>
+                        <a:t>34テーブル、複合外部キー、FORCE。静的検査と実DB検証をCIで実行</a:t>
                       </a:r>
                     </a:p>
                   </a:txBody>
@@ -21807,7 +21833,7 @@
                 <a:cs typeface="Meiryo"/>
                 <a:ea typeface="Meiryo"/>
               </a:rPr>
-              <a:t>33テーブルすべてで同じスキーマ規約。新しい表を足す手順が決まっている</a:t>
+              <a:t>34テーブルすべてで同じスキーマ規約。新しい表を足す手順が決まっている</a:t>
             </a:r>
           </a:p>
           <a:p>
@@ -21833,7 +21859,7 @@
                 <a:cs typeface="Meiryo"/>
                 <a:ea typeface="Meiryo"/>
               </a:rPr>
-              <a:t>毎pushで静的検査・型検査・692件のテスト・本番ビルド・混入検査まで自動実行</a:t>
+              <a:t>毎pushで静的検査・型検査・728件のテスト・本番ビルド・混入検査まで自動実行</a:t>
             </a:r>
           </a:p>
         </p:txBody>
@@ -22131,7 +22157,7 @@
                 <a:cs typeface="Meiryo"/>
                 <a:ea typeface="Meiryo"/>
               </a:rPr>
-              <a:t>:customers 37列の肥大化、業務データを平文にした前提、予約の二重取り防止、廃棄手順、監査の時期(doc/12 第3〜4章)</a:t>
+              <a:t>:customers 39列の肥大化、業務データを平文にした前提、予約の二重取り防止、廃棄手順、監査の時期(doc/12 第3〜4章)</a:t>
             </a:r>
           </a:p>
           <a:p>
@@ -23665,7 +23691,7 @@
                 <a:cs typeface="Meiryo"/>
                 <a:ea typeface="Meiryo"/>
               </a:rPr>
-              <a:t>TypeScript 228ファイル / 約25,900行</a:t>
+              <a:t>TypeScript 229ファイル / 約27,500行</a:t>
             </a:r>
             <a:r>
               <a:rPr sz="1050" b="0">
@@ -23702,7 +23728,7 @@
                 <a:cs typeface="Meiryo"/>
                 <a:ea typeface="Meiryo"/>
               </a:rPr>
-              <a:t>テスト 55ファイル / 692件</a:t>
+              <a:t>テスト 56ファイル / 728件</a:t>
             </a:r>
             <a:r>
               <a:rPr sz="1050" b="0">
@@ -23739,7 +23765,7 @@
                 <a:cs typeface="Meiryo"/>
                 <a:ea typeface="Meiryo"/>
               </a:rPr>
-              <a:t>データベース 33テーブル</a:t>
+              <a:t>データベース 34テーブル</a:t>
             </a:r>
             <a:r>
               <a:rPr sz="1050" b="0">
@@ -23750,7 +23776,7 @@
                 <a:cs typeface="Meiryo"/>
                 <a:ea typeface="Meiryo"/>
               </a:rPr>
-              <a:t> / マイグレーション1本</a:t>
+              <a:t> / マイグレーション2本</a:t>
             </a:r>
           </a:p>
         </p:txBody>
@@ -30658,7 +30684,7 @@
                 <a:ea typeface="Meiryo"/>
               </a:rPr>
               <a:t>「保存する」「送る」「暗号化する」という
-形(インターフェース)を28本定義している。
+形(インターフェース)を29本定義している。
 中身は書かない</a:t>
             </a:r>
           </a:p>

--- a/doc/13_アーキテクチャ説明資料.pptx
+++ b/doc/13_アーキテクチャ説明資料.pptx
@@ -23776,7 +23776,7 @@
                 <a:cs typeface="Meiryo"/>
                 <a:ea typeface="Meiryo"/>
               </a:rPr>
-              <a:t> / マイグレーション2本</a:t>
+              <a:t> / マイグレーション3本</a:t>
             </a:r>
           </a:p>
         </p:txBody>

--- a/doc/13_アーキテクチャ説明資料.pptx
+++ b/doc/13_アーキテクチャ説明資料.pptx
@@ -4962,7 +4962,7 @@
                 <a:cs typeface="Meiryo"/>
                 <a:ea typeface="Meiryo"/>
               </a:rPr>
-              <a:t>テストでは偽の実装を渡すだけで済む。データベースも外部APIも起動しないため、728件のテストが約15秒で終わる</a:t>
+              <a:t>テストでは偽の実装を渡すだけで済む。データベースも外部APIも起動しないため、769件のテストが約15秒で終わる</a:t>
             </a:r>
           </a:p>
         </p:txBody>
@@ -14390,7 +14390,7 @@
                 <a:cs typeface="Meiryo"/>
                 <a:ea typeface="Meiryo"/>
               </a:rPr>
-              <a:t>   テスト56ファイル / 728件。分布は意図的に偏らせている</a:t>
+              <a:t>   テスト57ファイル / 769件。分布は意図的に偏らせている</a:t>
             </a:r>
           </a:p>
         </p:txBody>
@@ -21859,7 +21859,7 @@
                 <a:cs typeface="Meiryo"/>
                 <a:ea typeface="Meiryo"/>
               </a:rPr>
-              <a:t>毎pushで静的検査・型検査・728件のテスト・本番ビルド・混入検査まで自動実行</a:t>
+              <a:t>毎pushで静的検査・型検査・769件のテスト・本番ビルド・混入検査まで自動実行</a:t>
             </a:r>
           </a:p>
         </p:txBody>
@@ -23728,7 +23728,7 @@
                 <a:cs typeface="Meiryo"/>
                 <a:ea typeface="Meiryo"/>
               </a:rPr>
-              <a:t>テスト 56ファイル / 728件</a:t>
+              <a:t>テスト 57ファイル / 769件</a:t>
             </a:r>
             <a:r>
               <a:rPr sz="1050" b="0">

--- a/doc/13_アーキテクチャ説明資料.pptx
+++ b/doc/13_アーキテクチャ説明資料.pptx
@@ -4962,7 +4962,7 @@
                 <a:cs typeface="Meiryo"/>
                 <a:ea typeface="Meiryo"/>
               </a:rPr>
-              <a:t>テストでは偽の実装を渡すだけで済む。データベースも外部APIも起動しないため、728件のテストが約15秒で終わる</a:t>
+              <a:t>テストでは偽の実装を渡すだけで済む。データベースも外部APIも起動しないため、769件のテストが約15秒で終わる</a:t>
             </a:r>
           </a:p>
         </p:txBody>
@@ -14390,7 +14390,7 @@
                 <a:cs typeface="Meiryo"/>
                 <a:ea typeface="Meiryo"/>
               </a:rPr>
-              <a:t>   テスト56ファイル / 728件。分布は意図的に偏らせている</a:t>
+              <a:t>   テスト57ファイル / 769件。分布は意図的に偏らせている</a:t>
             </a:r>
           </a:p>
         </p:txBody>
@@ -21859,7 +21859,7 @@
                 <a:cs typeface="Meiryo"/>
                 <a:ea typeface="Meiryo"/>
               </a:rPr>
-              <a:t>毎pushで静的検査・型検査・728件のテスト・本番ビルド・混入検査まで自動実行</a:t>
+              <a:t>毎pushで静的検査・型検査・769件のテスト・本番ビルド・混入検査まで自動実行</a:t>
             </a:r>
           </a:p>
         </p:txBody>
@@ -23728,7 +23728,7 @@
                 <a:cs typeface="Meiryo"/>
                 <a:ea typeface="Meiryo"/>
               </a:rPr>
-              <a:t>テスト 56ファイル / 728件</a:t>
+              <a:t>テスト 57ファイル / 769件</a:t>
             </a:r>
             <a:r>
               <a:rPr sz="1050" b="0">
@@ -23776,7 +23776,7 @@
                 <a:cs typeface="Meiryo"/>
                 <a:ea typeface="Meiryo"/>
               </a:rPr>
-              <a:t> / マイグレーション2本</a:t>
+              <a:t> / マイグレーション3本</a:t>
             </a:r>
           </a:p>
         </p:txBody>

--- a/doc/13_アーキテクチャ説明資料.pptx
+++ b/doc/13_アーキテクチャ説明資料.pptx
@@ -4962,7 +4962,7 @@
                 <a:cs typeface="Meiryo"/>
                 <a:ea typeface="Meiryo"/>
               </a:rPr>
-              <a:t>テストでは偽の実装を渡すだけで済む。データベースも外部APIも起動しないため、769件のテストが約15秒で終わる</a:t>
+              <a:t>テストでは偽の実装を渡すだけで済む。データベースも外部APIも起動しないため、828件のテストが約35秒で終わる</a:t>
             </a:r>
           </a:p>
         </p:txBody>
@@ -13771,6 +13771,32 @@
               <a:t>デモの暗号鍵は公開された固定値。訪問者が入力したAPIキー等は永続化しない</a:t>
             </a:r>
           </a:p>
+          <a:p>
+            <a:pPr marL="182880" indent="-182880">
+              <a:lnSpc>
+                <a:spcPct val="132000"/>
+              </a:lnSpc>
+              <a:spcBef>
+                <a:spcPts val="400"/>
+              </a:spcBef>
+              <a:buClr>
+                <a:srgbClr val="0369A1"/>
+              </a:buClr>
+              <a:buFont typeface="Meiryo"/>
+              <a:buChar char="▪"/>
+            </a:pPr>
+            <a:r>
+              <a:rPr sz="1050" b="0">
+                <a:solidFill>
+                  <a:srgbClr val="14223A"/>
+                </a:solidFill>
+                <a:latin typeface="Meiryo"/>
+                <a:cs typeface="Meiryo"/>
+                <a:ea typeface="Meiryo"/>
+              </a:rPr>
+              <a:t>デモデータは前回開いた日の翌日から「今日」まで自動で追い足す(何日か空けても履歴が続く)</a:t>
+            </a:r>
+          </a:p>
         </p:txBody>
       </p:sp>
       <p:sp>
@@ -14390,7 +14416,7 @@
                 <a:cs typeface="Meiryo"/>
                 <a:ea typeface="Meiryo"/>
               </a:rPr>
-              <a:t>   テスト57ファイル / 769件。分布は意図的に偏らせている</a:t>
+              <a:t>   テスト62ファイル / 828件。分布は意図的に偏らせている</a:t>
             </a:r>
           </a:p>
         </p:txBody>
@@ -21859,7 +21885,7 @@
                 <a:cs typeface="Meiryo"/>
                 <a:ea typeface="Meiryo"/>
               </a:rPr>
-              <a:t>毎pushで静的検査・型検査・769件のテスト・本番ビルド・混入検査まで自動実行</a:t>
+              <a:t>毎pushで静的検査・型検査・828件のテスト・本番ビルド・混入検査まで自動実行</a:t>
             </a:r>
           </a:p>
         </p:txBody>
@@ -22207,8 +22233,8 @@
         </p:nvSpPr>
         <p:spPr>
           <a:xfrm>
-            <a:off x="457200" y="5532120"/>
-            <a:ext cx="11277295" cy="830326"/>
+            <a:off x="457200" y="5356479"/>
+            <a:ext cx="11277295" cy="1026033"/>
           </a:xfrm>
           <a:prstGeom prst="roundRect">
             <a:avLst>
@@ -22253,8 +22279,8 @@
         </p:nvSpPr>
         <p:spPr>
           <a:xfrm>
-            <a:off x="457200" y="5532120"/>
-            <a:ext cx="68580" cy="830326"/>
+            <a:off x="457200" y="5356479"/>
+            <a:ext cx="68580" cy="1026033"/>
           </a:xfrm>
           <a:prstGeom prst="rect">
             <a:avLst/>
@@ -22297,7 +22323,7 @@
         </p:nvSpPr>
         <p:spPr>
           <a:xfrm>
-            <a:off x="640080" y="5623559"/>
+            <a:off x="640080" y="5447919"/>
             <a:ext cx="10911535" cy="237744"/>
           </a:xfrm>
           <a:prstGeom prst="rect">
@@ -22339,8 +22365,8 @@
         </p:nvSpPr>
         <p:spPr>
           <a:xfrm>
-            <a:off x="640080" y="5879592"/>
-            <a:ext cx="10929823" cy="409701"/>
+            <a:off x="640080" y="5703951"/>
+            <a:ext cx="10929823" cy="605409"/>
           </a:xfrm>
           <a:prstGeom prst="rect">
             <a:avLst/>
@@ -22368,7 +22394,7 @@
                 <a:cs typeface="Meiryo"/>
                 <a:ea typeface="Meiryo"/>
               </a:rPr>
-              <a:t>doc/07 技術構成提案書 / doc/09 データベース構造解説 / doc/10 GAS版連携の制約と方針 / doc/11 アーキテクチャ説明スライド(HTML) / doc/12 データベース構造レビュー資料(PowerPoint)  —  公開デモ:https://ohru131.github.io/katahimo-app/</a:t>
+              <a:t>doc/07 技術構成提案書 / doc/09 データベース構造解説 / doc/10 GAS版連携の制約と方針 / doc/11 アーキテクチャ説明スライド(HTML) / doc/12 データベース構造レビュー資料(PowerPoint) / doc/14 設計の指針と落とし穴 / doc/15 追加ドメインの設計とレビュー論点 / doc/16 データベース構造リファレンス(自動生成) / doc/17 データベース設計 業務確認用資料(PowerPoint)  —  公開デモ:https://ohru131.github.io/katahimo-app/</a:t>
             </a:r>
           </a:p>
         </p:txBody>
@@ -23691,7 +23717,7 @@
                 <a:cs typeface="Meiryo"/>
                 <a:ea typeface="Meiryo"/>
               </a:rPr>
-              <a:t>TypeScript 229ファイル / 約27,500行</a:t>
+              <a:t>TypeScript 246ファイル / 約32,100行</a:t>
             </a:r>
             <a:r>
               <a:rPr sz="1050" b="0">
@@ -23728,7 +23754,7 @@
                 <a:cs typeface="Meiryo"/>
                 <a:ea typeface="Meiryo"/>
               </a:rPr>
-              <a:t>テスト 57ファイル / 769件</a:t>
+              <a:t>テスト 62ファイル / 828件</a:t>
             </a:r>
             <a:r>
               <a:rPr sz="1050" b="0">
@@ -23776,7 +23802,7 @@
                 <a:cs typeface="Meiryo"/>
                 <a:ea typeface="Meiryo"/>
               </a:rPr>
-              <a:t> / マイグレーション3本</a:t>
+              <a:t> / マイグレーション4本</a:t>
             </a:r>
           </a:p>
         </p:txBody>
@@ -23992,7 +24018,7 @@
                 <a:cs typeface="Meiryo"/>
                 <a:ea typeface="Meiryo"/>
               </a:rPr>
-              <a:t>認証 / 顧客 / 日報・事故報告 / 領収書 / 勤怠 / スタッフ管理 / RESERVA取込 / 公開デモ</a:t>
+              <a:t>認証 / 顧客 / 日報・事故報告 / 領収書 / 勤怠(月次集計・カレンダー反映) / スタッフ管理 / RESERVA取込 / 割引クーポン / 公開デモ</a:t>
             </a:r>
           </a:p>
         </p:txBody>
@@ -27185,7 +27211,7 @@
                           <a:cs typeface="Meiryo"/>
                           <a:ea typeface="Meiryo"/>
                         </a:rPr>
-                        <a:t>Drizzle ORM 0.38</a:t>
+                        <a:t>Drizzle ORM 0.45</a:t>
                       </a:r>
                     </a:p>
                   </a:txBody>
@@ -27429,7 +27455,7 @@
                           <a:cs typeface="Meiryo"/>
                           <a:ea typeface="Meiryo"/>
                         </a:rPr>
-                        <a:t>React 19 + Vite + Tailwind CSS + PWA</a:t>
+                        <a:t>React 18 + Vite + Tailwind CSS + PWA</a:t>
                       </a:r>
                     </a:p>
                   </a:txBody>
